--- a/VI Sem/Application Containerisation/Container Basics.pptx
+++ b/VI Sem/Application Containerisation/Container Basics.pptx
@@ -9,6 +9,12 @@
     <p:sldId id="257" r:id="rId3"/>
     <p:sldId id="258" r:id="rId4"/>
     <p:sldId id="259" r:id="rId5"/>
+    <p:sldId id="260" r:id="rId6"/>
+    <p:sldId id="261" r:id="rId7"/>
+    <p:sldId id="262" r:id="rId8"/>
+    <p:sldId id="263" r:id="rId9"/>
+    <p:sldId id="264" r:id="rId10"/>
+    <p:sldId id="265" r:id="rId11"/>
   </p:sldIdLst>
   <p:sldSz cx="12192000" cy="6858000"/>
   <p:notesSz cx="6858000" cy="9144000"/>
@@ -120,22 +126,97 @@
   <pc:docChgLst>
     <pc:chgData name="Utkarsh Agarwal" userId="7a1216fa42ee05d0" providerId="LiveId" clId="{5A8ABE04-300D-46CD-9942-40B59078845C}"/>
     <pc:docChg chg="addSld modSld">
-      <pc:chgData name="Utkarsh Agarwal" userId="7a1216fa42ee05d0" providerId="LiveId" clId="{5A8ABE04-300D-46CD-9942-40B59078845C}" dt="2026-03-02T04:18:28.289" v="1" actId="22"/>
+      <pc:chgData name="Utkarsh Agarwal" userId="7a1216fa42ee05d0" providerId="LiveId" clId="{5A8ABE04-300D-46CD-9942-40B59078845C}" dt="2026-04-06T15:16:39.931" v="13" actId="22"/>
       <pc:docMkLst>
         <pc:docMk/>
       </pc:docMkLst>
       <pc:sldChg chg="addSp new mod">
-        <pc:chgData name="Utkarsh Agarwal" userId="7a1216fa42ee05d0" providerId="LiveId" clId="{5A8ABE04-300D-46CD-9942-40B59078845C}" dt="2026-03-02T04:18:28.289" v="1" actId="22"/>
+        <pc:chgData name="Utkarsh Agarwal" userId="7a1216fa42ee05d0" providerId="LiveId" clId="{5A8ABE04-300D-46CD-9942-40B59078845C}" dt="2026-04-06T12:58:15.874" v="3" actId="22"/>
         <pc:sldMkLst>
           <pc:docMk/>
-          <pc:sldMk cId="1563795950" sldId="259"/>
+          <pc:sldMk cId="2454838553" sldId="260"/>
         </pc:sldMkLst>
         <pc:picChg chg="add">
-          <ac:chgData name="Utkarsh Agarwal" userId="7a1216fa42ee05d0" providerId="LiveId" clId="{5A8ABE04-300D-46CD-9942-40B59078845C}" dt="2026-03-02T04:18:28.289" v="1" actId="22"/>
+          <ac:chgData name="Utkarsh Agarwal" userId="7a1216fa42ee05d0" providerId="LiveId" clId="{5A8ABE04-300D-46CD-9942-40B59078845C}" dt="2026-04-06T12:58:15.874" v="3" actId="22"/>
           <ac:picMkLst>
             <pc:docMk/>
-            <pc:sldMk cId="1563795950" sldId="259"/>
-            <ac:picMk id="5" creationId="{9E0C0441-E9A6-B94C-8666-033F84307F04}"/>
+            <pc:sldMk cId="2454838553" sldId="260"/>
+            <ac:picMk id="5" creationId="{0C7492C2-06C2-4887-6700-D568178AF38D}"/>
+          </ac:picMkLst>
+        </pc:picChg>
+      </pc:sldChg>
+      <pc:sldChg chg="addSp new mod">
+        <pc:chgData name="Utkarsh Agarwal" userId="7a1216fa42ee05d0" providerId="LiveId" clId="{5A8ABE04-300D-46CD-9942-40B59078845C}" dt="2026-04-06T13:25:18.077" v="5" actId="22"/>
+        <pc:sldMkLst>
+          <pc:docMk/>
+          <pc:sldMk cId="815970323" sldId="261"/>
+        </pc:sldMkLst>
+        <pc:picChg chg="add">
+          <ac:chgData name="Utkarsh Agarwal" userId="7a1216fa42ee05d0" providerId="LiveId" clId="{5A8ABE04-300D-46CD-9942-40B59078845C}" dt="2026-04-06T13:25:18.077" v="5" actId="22"/>
+          <ac:picMkLst>
+            <pc:docMk/>
+            <pc:sldMk cId="815970323" sldId="261"/>
+            <ac:picMk id="5" creationId="{92718562-EDA2-5D8B-4EB7-F2C1DEFAB33B}"/>
+          </ac:picMkLst>
+        </pc:picChg>
+      </pc:sldChg>
+      <pc:sldChg chg="addSp new mod">
+        <pc:chgData name="Utkarsh Agarwal" userId="7a1216fa42ee05d0" providerId="LiveId" clId="{5A8ABE04-300D-46CD-9942-40B59078845C}" dt="2026-04-06T13:29:55.102" v="7" actId="22"/>
+        <pc:sldMkLst>
+          <pc:docMk/>
+          <pc:sldMk cId="233973340" sldId="262"/>
+        </pc:sldMkLst>
+        <pc:picChg chg="add">
+          <ac:chgData name="Utkarsh Agarwal" userId="7a1216fa42ee05d0" providerId="LiveId" clId="{5A8ABE04-300D-46CD-9942-40B59078845C}" dt="2026-04-06T13:29:55.102" v="7" actId="22"/>
+          <ac:picMkLst>
+            <pc:docMk/>
+            <pc:sldMk cId="233973340" sldId="262"/>
+            <ac:picMk id="5" creationId="{00A51B2C-507F-5A8D-0FA5-607B77E591E5}"/>
+          </ac:picMkLst>
+        </pc:picChg>
+      </pc:sldChg>
+      <pc:sldChg chg="addSp new mod">
+        <pc:chgData name="Utkarsh Agarwal" userId="7a1216fa42ee05d0" providerId="LiveId" clId="{5A8ABE04-300D-46CD-9942-40B59078845C}" dt="2026-04-06T13:33:41.555" v="9" actId="22"/>
+        <pc:sldMkLst>
+          <pc:docMk/>
+          <pc:sldMk cId="922980972" sldId="263"/>
+        </pc:sldMkLst>
+        <pc:picChg chg="add">
+          <ac:chgData name="Utkarsh Agarwal" userId="7a1216fa42ee05d0" providerId="LiveId" clId="{5A8ABE04-300D-46CD-9942-40B59078845C}" dt="2026-04-06T13:33:41.555" v="9" actId="22"/>
+          <ac:picMkLst>
+            <pc:docMk/>
+            <pc:sldMk cId="922980972" sldId="263"/>
+            <ac:picMk id="5" creationId="{E5F963CF-735E-D5D2-53A6-580027CE298B}"/>
+          </ac:picMkLst>
+        </pc:picChg>
+      </pc:sldChg>
+      <pc:sldChg chg="addSp new mod">
+        <pc:chgData name="Utkarsh Agarwal" userId="7a1216fa42ee05d0" providerId="LiveId" clId="{5A8ABE04-300D-46CD-9942-40B59078845C}" dt="2026-04-06T13:37:14.842" v="11" actId="22"/>
+        <pc:sldMkLst>
+          <pc:docMk/>
+          <pc:sldMk cId="469281924" sldId="264"/>
+        </pc:sldMkLst>
+        <pc:picChg chg="add">
+          <ac:chgData name="Utkarsh Agarwal" userId="7a1216fa42ee05d0" providerId="LiveId" clId="{5A8ABE04-300D-46CD-9942-40B59078845C}" dt="2026-04-06T13:37:14.842" v="11" actId="22"/>
+          <ac:picMkLst>
+            <pc:docMk/>
+            <pc:sldMk cId="469281924" sldId="264"/>
+            <ac:picMk id="5" creationId="{73CEB777-9FC8-398F-2065-40A5A2EB279D}"/>
+          </ac:picMkLst>
+        </pc:picChg>
+      </pc:sldChg>
+      <pc:sldChg chg="addSp new mod">
+        <pc:chgData name="Utkarsh Agarwal" userId="7a1216fa42ee05d0" providerId="LiveId" clId="{5A8ABE04-300D-46CD-9942-40B59078845C}" dt="2026-04-06T15:16:39.931" v="13" actId="22"/>
+        <pc:sldMkLst>
+          <pc:docMk/>
+          <pc:sldMk cId="3661936665" sldId="265"/>
+        </pc:sldMkLst>
+        <pc:picChg chg="add">
+          <ac:chgData name="Utkarsh Agarwal" userId="7a1216fa42ee05d0" providerId="LiveId" clId="{5A8ABE04-300D-46CD-9942-40B59078845C}" dt="2026-04-06T15:16:39.931" v="13" actId="22"/>
+          <ac:picMkLst>
+            <pc:docMk/>
+            <pc:sldMk cId="3661936665" sldId="265"/>
+            <ac:picMk id="5" creationId="{1E4C1673-EC36-FEF7-D986-D23E4CBC7362}"/>
           </ac:picMkLst>
         </pc:picChg>
       </pc:sldChg>
@@ -293,7 +374,7 @@
           <a:p>
             <a:fld id="{4443064D-830F-45CB-B33A-CE5F98D3C964}" type="datetimeFigureOut">
               <a:rPr lang="en-IN" smtClean="0"/>
-              <a:t>02-03-2026</a:t>
+              <a:t>06-04-2026</a:t>
             </a:fld>
             <a:endParaRPr lang="en-IN"/>
           </a:p>
@@ -493,7 +574,7 @@
           <a:p>
             <a:fld id="{4443064D-830F-45CB-B33A-CE5F98D3C964}" type="datetimeFigureOut">
               <a:rPr lang="en-IN" smtClean="0"/>
-              <a:t>02-03-2026</a:t>
+              <a:t>06-04-2026</a:t>
             </a:fld>
             <a:endParaRPr lang="en-IN"/>
           </a:p>
@@ -703,7 +784,7 @@
           <a:p>
             <a:fld id="{4443064D-830F-45CB-B33A-CE5F98D3C964}" type="datetimeFigureOut">
               <a:rPr lang="en-IN" smtClean="0"/>
-              <a:t>02-03-2026</a:t>
+              <a:t>06-04-2026</a:t>
             </a:fld>
             <a:endParaRPr lang="en-IN"/>
           </a:p>
@@ -903,7 +984,7 @@
           <a:p>
             <a:fld id="{4443064D-830F-45CB-B33A-CE5F98D3C964}" type="datetimeFigureOut">
               <a:rPr lang="en-IN" smtClean="0"/>
-              <a:t>02-03-2026</a:t>
+              <a:t>06-04-2026</a:t>
             </a:fld>
             <a:endParaRPr lang="en-IN"/>
           </a:p>
@@ -1179,7 +1260,7 @@
           <a:p>
             <a:fld id="{4443064D-830F-45CB-B33A-CE5F98D3C964}" type="datetimeFigureOut">
               <a:rPr lang="en-IN" smtClean="0"/>
-              <a:t>02-03-2026</a:t>
+              <a:t>06-04-2026</a:t>
             </a:fld>
             <a:endParaRPr lang="en-IN"/>
           </a:p>
@@ -1447,7 +1528,7 @@
           <a:p>
             <a:fld id="{4443064D-830F-45CB-B33A-CE5F98D3C964}" type="datetimeFigureOut">
               <a:rPr lang="en-IN" smtClean="0"/>
-              <a:t>02-03-2026</a:t>
+              <a:t>06-04-2026</a:t>
             </a:fld>
             <a:endParaRPr lang="en-IN"/>
           </a:p>
@@ -1862,7 +1943,7 @@
           <a:p>
             <a:fld id="{4443064D-830F-45CB-B33A-CE5F98D3C964}" type="datetimeFigureOut">
               <a:rPr lang="en-IN" smtClean="0"/>
-              <a:t>02-03-2026</a:t>
+              <a:t>06-04-2026</a:t>
             </a:fld>
             <a:endParaRPr lang="en-IN"/>
           </a:p>
@@ -2004,7 +2085,7 @@
           <a:p>
             <a:fld id="{4443064D-830F-45CB-B33A-CE5F98D3C964}" type="datetimeFigureOut">
               <a:rPr lang="en-IN" smtClean="0"/>
-              <a:t>02-03-2026</a:t>
+              <a:t>06-04-2026</a:t>
             </a:fld>
             <a:endParaRPr lang="en-IN"/>
           </a:p>
@@ -2117,7 +2198,7 @@
           <a:p>
             <a:fld id="{4443064D-830F-45CB-B33A-CE5F98D3C964}" type="datetimeFigureOut">
               <a:rPr lang="en-IN" smtClean="0"/>
-              <a:t>02-03-2026</a:t>
+              <a:t>06-04-2026</a:t>
             </a:fld>
             <a:endParaRPr lang="en-IN"/>
           </a:p>
@@ -2430,7 +2511,7 @@
           <a:p>
             <a:fld id="{4443064D-830F-45CB-B33A-CE5F98D3C964}" type="datetimeFigureOut">
               <a:rPr lang="en-IN" smtClean="0"/>
-              <a:t>02-03-2026</a:t>
+              <a:t>06-04-2026</a:t>
             </a:fld>
             <a:endParaRPr lang="en-IN"/>
           </a:p>
@@ -2719,7 +2800,7 @@
           <a:p>
             <a:fld id="{4443064D-830F-45CB-B33A-CE5F98D3C964}" type="datetimeFigureOut">
               <a:rPr lang="en-IN" smtClean="0"/>
-              <a:t>02-03-2026</a:t>
+              <a:t>06-04-2026</a:t>
             </a:fld>
             <a:endParaRPr lang="en-IN"/>
           </a:p>
@@ -2962,7 +3043,7 @@
           <a:p>
             <a:fld id="{4443064D-830F-45CB-B33A-CE5F98D3C964}" type="datetimeFigureOut">
               <a:rPr lang="en-IN" smtClean="0"/>
-              <a:t>02-03-2026</a:t>
+              <a:t>06-04-2026</a:t>
             </a:fld>
             <a:endParaRPr lang="en-IN"/>
           </a:p>
@@ -3472,6 +3553,116 @@
 </p:sld>
 </file>
 
+<file path=ppt/slides/slide10.xml><?xml version="1.0" encoding="utf-8"?>
+<p:sld xmlns:a="http://schemas.openxmlformats.org/drawingml/2006/main" xmlns:r="http://schemas.openxmlformats.org/officeDocument/2006/relationships" xmlns:p="http://schemas.openxmlformats.org/presentationml/2006/main">
+  <p:cSld>
+    <p:spTree>
+      <p:nvGrpSpPr>
+        <p:cNvPr id="1" name=""/>
+        <p:cNvGrpSpPr/>
+        <p:nvPr/>
+      </p:nvGrpSpPr>
+      <p:grpSpPr>
+        <a:xfrm>
+          <a:off x="0" y="0"/>
+          <a:ext cx="0" cy="0"/>
+          <a:chOff x="0" y="0"/>
+          <a:chExt cx="0" cy="0"/>
+        </a:xfrm>
+      </p:grpSpPr>
+      <p:sp>
+        <p:nvSpPr>
+          <p:cNvPr id="2" name="Title 1">
+            <a:extLst>
+              <a:ext uri="{FF2B5EF4-FFF2-40B4-BE49-F238E27FC236}">
+                <a16:creationId xmlns:a16="http://schemas.microsoft.com/office/drawing/2014/main" id="{AF77CA8A-6B33-A662-A9F1-6B09896ED09B}"/>
+              </a:ext>
+            </a:extLst>
+          </p:cNvPr>
+          <p:cNvSpPr>
+            <a:spLocks noGrp="1"/>
+          </p:cNvSpPr>
+          <p:nvPr>
+            <p:ph type="title"/>
+          </p:nvPr>
+        </p:nvSpPr>
+        <p:spPr/>
+        <p:txBody>
+          <a:bodyPr/>
+          <a:lstStyle/>
+          <a:p>
+            <a:endParaRPr lang="en-IN"/>
+          </a:p>
+        </p:txBody>
+      </p:sp>
+      <p:sp>
+        <p:nvSpPr>
+          <p:cNvPr id="3" name="Content Placeholder 2">
+            <a:extLst>
+              <a:ext uri="{FF2B5EF4-FFF2-40B4-BE49-F238E27FC236}">
+                <a16:creationId xmlns:a16="http://schemas.microsoft.com/office/drawing/2014/main" id="{293B8335-BA23-BDB6-01E5-FD066A06FBAC}"/>
+              </a:ext>
+            </a:extLst>
+          </p:cNvPr>
+          <p:cNvSpPr>
+            <a:spLocks noGrp="1"/>
+          </p:cNvSpPr>
+          <p:nvPr>
+            <p:ph idx="1"/>
+          </p:nvPr>
+        </p:nvSpPr>
+        <p:spPr/>
+        <p:txBody>
+          <a:bodyPr/>
+          <a:lstStyle/>
+          <a:p>
+            <a:endParaRPr lang="en-IN"/>
+          </a:p>
+        </p:txBody>
+      </p:sp>
+      <p:pic>
+        <p:nvPicPr>
+          <p:cNvPr id="5" name="Picture 4">
+            <a:extLst>
+              <a:ext uri="{FF2B5EF4-FFF2-40B4-BE49-F238E27FC236}">
+                <a16:creationId xmlns:a16="http://schemas.microsoft.com/office/drawing/2014/main" id="{1E4C1673-EC36-FEF7-D986-D23E4CBC7362}"/>
+              </a:ext>
+            </a:extLst>
+          </p:cNvPr>
+          <p:cNvPicPr>
+            <a:picLocks noChangeAspect="1"/>
+          </p:cNvPicPr>
+          <p:nvPr/>
+        </p:nvPicPr>
+        <p:blipFill>
+          <a:blip r:embed="rId2"/>
+          <a:stretch>
+            <a:fillRect/>
+          </a:stretch>
+        </p:blipFill>
+        <p:spPr>
+          <a:xfrm>
+            <a:off x="0" y="585024"/>
+            <a:ext cx="12192000" cy="5687951"/>
+          </a:xfrm>
+          <a:prstGeom prst="rect">
+            <a:avLst/>
+          </a:prstGeom>
+        </p:spPr>
+      </p:pic>
+    </p:spTree>
+    <p:extLst>
+      <p:ext uri="{BB962C8B-B14F-4D97-AF65-F5344CB8AC3E}">
+        <p14:creationId xmlns:p14="http://schemas.microsoft.com/office/powerpoint/2010/main" val="3661936665"/>
+      </p:ext>
+    </p:extLst>
+  </p:cSld>
+  <p:clrMapOvr>
+    <a:masterClrMapping/>
+  </p:clrMapOvr>
+</p:sld>
+</file>
+
 <file path=ppt/slides/slide2.xml><?xml version="1.0" encoding="utf-8"?>
 <p:sld xmlns:a="http://schemas.openxmlformats.org/drawingml/2006/main" xmlns:r="http://schemas.openxmlformats.org/officeDocument/2006/relationships" xmlns:p="http://schemas.openxmlformats.org/presentationml/2006/main">
   <p:cSld>
@@ -3793,6 +3984,556 @@
     <p:extLst>
       <p:ext uri="{BB962C8B-B14F-4D97-AF65-F5344CB8AC3E}">
         <p14:creationId xmlns:p14="http://schemas.microsoft.com/office/powerpoint/2010/main" val="1563795950"/>
+      </p:ext>
+    </p:extLst>
+  </p:cSld>
+  <p:clrMapOvr>
+    <a:masterClrMapping/>
+  </p:clrMapOvr>
+</p:sld>
+</file>
+
+<file path=ppt/slides/slide5.xml><?xml version="1.0" encoding="utf-8"?>
+<p:sld xmlns:a="http://schemas.openxmlformats.org/drawingml/2006/main" xmlns:r="http://schemas.openxmlformats.org/officeDocument/2006/relationships" xmlns:p="http://schemas.openxmlformats.org/presentationml/2006/main">
+  <p:cSld>
+    <p:spTree>
+      <p:nvGrpSpPr>
+        <p:cNvPr id="1" name=""/>
+        <p:cNvGrpSpPr/>
+        <p:nvPr/>
+      </p:nvGrpSpPr>
+      <p:grpSpPr>
+        <a:xfrm>
+          <a:off x="0" y="0"/>
+          <a:ext cx="0" cy="0"/>
+          <a:chOff x="0" y="0"/>
+          <a:chExt cx="0" cy="0"/>
+        </a:xfrm>
+      </p:grpSpPr>
+      <p:sp>
+        <p:nvSpPr>
+          <p:cNvPr id="2" name="Title 1">
+            <a:extLst>
+              <a:ext uri="{FF2B5EF4-FFF2-40B4-BE49-F238E27FC236}">
+                <a16:creationId xmlns:a16="http://schemas.microsoft.com/office/drawing/2014/main" id="{D26259BC-5806-0C05-EA21-B5C7DA71154E}"/>
+              </a:ext>
+            </a:extLst>
+          </p:cNvPr>
+          <p:cNvSpPr>
+            <a:spLocks noGrp="1"/>
+          </p:cNvSpPr>
+          <p:nvPr>
+            <p:ph type="title"/>
+          </p:nvPr>
+        </p:nvSpPr>
+        <p:spPr/>
+        <p:txBody>
+          <a:bodyPr/>
+          <a:lstStyle/>
+          <a:p>
+            <a:endParaRPr lang="en-IN"/>
+          </a:p>
+        </p:txBody>
+      </p:sp>
+      <p:sp>
+        <p:nvSpPr>
+          <p:cNvPr id="3" name="Content Placeholder 2">
+            <a:extLst>
+              <a:ext uri="{FF2B5EF4-FFF2-40B4-BE49-F238E27FC236}">
+                <a16:creationId xmlns:a16="http://schemas.microsoft.com/office/drawing/2014/main" id="{F0087679-DF3C-430E-2BD4-7D6E2D81EB63}"/>
+              </a:ext>
+            </a:extLst>
+          </p:cNvPr>
+          <p:cNvSpPr>
+            <a:spLocks noGrp="1"/>
+          </p:cNvSpPr>
+          <p:nvPr>
+            <p:ph idx="1"/>
+          </p:nvPr>
+        </p:nvSpPr>
+        <p:spPr/>
+        <p:txBody>
+          <a:bodyPr/>
+          <a:lstStyle/>
+          <a:p>
+            <a:endParaRPr lang="en-IN"/>
+          </a:p>
+        </p:txBody>
+      </p:sp>
+      <p:pic>
+        <p:nvPicPr>
+          <p:cNvPr id="5" name="Picture 4">
+            <a:extLst>
+              <a:ext uri="{FF2B5EF4-FFF2-40B4-BE49-F238E27FC236}">
+                <a16:creationId xmlns:a16="http://schemas.microsoft.com/office/drawing/2014/main" id="{0C7492C2-06C2-4887-6700-D568178AF38D}"/>
+              </a:ext>
+            </a:extLst>
+          </p:cNvPr>
+          <p:cNvPicPr>
+            <a:picLocks noChangeAspect="1"/>
+          </p:cNvPicPr>
+          <p:nvPr/>
+        </p:nvPicPr>
+        <p:blipFill>
+          <a:blip r:embed="rId2"/>
+          <a:stretch>
+            <a:fillRect/>
+          </a:stretch>
+        </p:blipFill>
+        <p:spPr>
+          <a:xfrm>
+            <a:off x="1267789" y="0"/>
+            <a:ext cx="9656422" cy="6858000"/>
+          </a:xfrm>
+          <a:prstGeom prst="rect">
+            <a:avLst/>
+          </a:prstGeom>
+        </p:spPr>
+      </p:pic>
+    </p:spTree>
+    <p:extLst>
+      <p:ext uri="{BB962C8B-B14F-4D97-AF65-F5344CB8AC3E}">
+        <p14:creationId xmlns:p14="http://schemas.microsoft.com/office/powerpoint/2010/main" val="2454838553"/>
+      </p:ext>
+    </p:extLst>
+  </p:cSld>
+  <p:clrMapOvr>
+    <a:masterClrMapping/>
+  </p:clrMapOvr>
+</p:sld>
+</file>
+
+<file path=ppt/slides/slide6.xml><?xml version="1.0" encoding="utf-8"?>
+<p:sld xmlns:a="http://schemas.openxmlformats.org/drawingml/2006/main" xmlns:r="http://schemas.openxmlformats.org/officeDocument/2006/relationships" xmlns:p="http://schemas.openxmlformats.org/presentationml/2006/main">
+  <p:cSld>
+    <p:spTree>
+      <p:nvGrpSpPr>
+        <p:cNvPr id="1" name=""/>
+        <p:cNvGrpSpPr/>
+        <p:nvPr/>
+      </p:nvGrpSpPr>
+      <p:grpSpPr>
+        <a:xfrm>
+          <a:off x="0" y="0"/>
+          <a:ext cx="0" cy="0"/>
+          <a:chOff x="0" y="0"/>
+          <a:chExt cx="0" cy="0"/>
+        </a:xfrm>
+      </p:grpSpPr>
+      <p:sp>
+        <p:nvSpPr>
+          <p:cNvPr id="2" name="Title 1">
+            <a:extLst>
+              <a:ext uri="{FF2B5EF4-FFF2-40B4-BE49-F238E27FC236}">
+                <a16:creationId xmlns:a16="http://schemas.microsoft.com/office/drawing/2014/main" id="{4209F837-44B7-E4AB-CE42-2CC5D183FDB7}"/>
+              </a:ext>
+            </a:extLst>
+          </p:cNvPr>
+          <p:cNvSpPr>
+            <a:spLocks noGrp="1"/>
+          </p:cNvSpPr>
+          <p:nvPr>
+            <p:ph type="title"/>
+          </p:nvPr>
+        </p:nvSpPr>
+        <p:spPr/>
+        <p:txBody>
+          <a:bodyPr/>
+          <a:lstStyle/>
+          <a:p>
+            <a:endParaRPr lang="en-IN"/>
+          </a:p>
+        </p:txBody>
+      </p:sp>
+      <p:sp>
+        <p:nvSpPr>
+          <p:cNvPr id="3" name="Content Placeholder 2">
+            <a:extLst>
+              <a:ext uri="{FF2B5EF4-FFF2-40B4-BE49-F238E27FC236}">
+                <a16:creationId xmlns:a16="http://schemas.microsoft.com/office/drawing/2014/main" id="{E1320A71-992A-4792-798F-D83C3FB5C4FC}"/>
+              </a:ext>
+            </a:extLst>
+          </p:cNvPr>
+          <p:cNvSpPr>
+            <a:spLocks noGrp="1"/>
+          </p:cNvSpPr>
+          <p:nvPr>
+            <p:ph idx="1"/>
+          </p:nvPr>
+        </p:nvSpPr>
+        <p:spPr/>
+        <p:txBody>
+          <a:bodyPr/>
+          <a:lstStyle/>
+          <a:p>
+            <a:endParaRPr lang="en-IN"/>
+          </a:p>
+        </p:txBody>
+      </p:sp>
+      <p:pic>
+        <p:nvPicPr>
+          <p:cNvPr id="5" name="Picture 4">
+            <a:extLst>
+              <a:ext uri="{FF2B5EF4-FFF2-40B4-BE49-F238E27FC236}">
+                <a16:creationId xmlns:a16="http://schemas.microsoft.com/office/drawing/2014/main" id="{92718562-EDA2-5D8B-4EB7-F2C1DEFAB33B}"/>
+              </a:ext>
+            </a:extLst>
+          </p:cNvPr>
+          <p:cNvPicPr>
+            <a:picLocks noChangeAspect="1"/>
+          </p:cNvPicPr>
+          <p:nvPr/>
+        </p:nvPicPr>
+        <p:blipFill>
+          <a:blip r:embed="rId2"/>
+          <a:stretch>
+            <a:fillRect/>
+          </a:stretch>
+        </p:blipFill>
+        <p:spPr>
+          <a:xfrm>
+            <a:off x="1266251" y="0"/>
+            <a:ext cx="9659497" cy="6858000"/>
+          </a:xfrm>
+          <a:prstGeom prst="rect">
+            <a:avLst/>
+          </a:prstGeom>
+        </p:spPr>
+      </p:pic>
+    </p:spTree>
+    <p:extLst>
+      <p:ext uri="{BB962C8B-B14F-4D97-AF65-F5344CB8AC3E}">
+        <p14:creationId xmlns:p14="http://schemas.microsoft.com/office/powerpoint/2010/main" val="815970323"/>
+      </p:ext>
+    </p:extLst>
+  </p:cSld>
+  <p:clrMapOvr>
+    <a:masterClrMapping/>
+  </p:clrMapOvr>
+</p:sld>
+</file>
+
+<file path=ppt/slides/slide7.xml><?xml version="1.0" encoding="utf-8"?>
+<p:sld xmlns:a="http://schemas.openxmlformats.org/drawingml/2006/main" xmlns:r="http://schemas.openxmlformats.org/officeDocument/2006/relationships" xmlns:p="http://schemas.openxmlformats.org/presentationml/2006/main">
+  <p:cSld>
+    <p:spTree>
+      <p:nvGrpSpPr>
+        <p:cNvPr id="1" name=""/>
+        <p:cNvGrpSpPr/>
+        <p:nvPr/>
+      </p:nvGrpSpPr>
+      <p:grpSpPr>
+        <a:xfrm>
+          <a:off x="0" y="0"/>
+          <a:ext cx="0" cy="0"/>
+          <a:chOff x="0" y="0"/>
+          <a:chExt cx="0" cy="0"/>
+        </a:xfrm>
+      </p:grpSpPr>
+      <p:sp>
+        <p:nvSpPr>
+          <p:cNvPr id="2" name="Title 1">
+            <a:extLst>
+              <a:ext uri="{FF2B5EF4-FFF2-40B4-BE49-F238E27FC236}">
+                <a16:creationId xmlns:a16="http://schemas.microsoft.com/office/drawing/2014/main" id="{5EB7904A-1214-DA25-A209-186FDDF392C1}"/>
+              </a:ext>
+            </a:extLst>
+          </p:cNvPr>
+          <p:cNvSpPr>
+            <a:spLocks noGrp="1"/>
+          </p:cNvSpPr>
+          <p:nvPr>
+            <p:ph type="title"/>
+          </p:nvPr>
+        </p:nvSpPr>
+        <p:spPr/>
+        <p:txBody>
+          <a:bodyPr/>
+          <a:lstStyle/>
+          <a:p>
+            <a:endParaRPr lang="en-IN"/>
+          </a:p>
+        </p:txBody>
+      </p:sp>
+      <p:sp>
+        <p:nvSpPr>
+          <p:cNvPr id="3" name="Content Placeholder 2">
+            <a:extLst>
+              <a:ext uri="{FF2B5EF4-FFF2-40B4-BE49-F238E27FC236}">
+                <a16:creationId xmlns:a16="http://schemas.microsoft.com/office/drawing/2014/main" id="{D037DA36-33C2-3E4C-7F82-D24FEE477B67}"/>
+              </a:ext>
+            </a:extLst>
+          </p:cNvPr>
+          <p:cNvSpPr>
+            <a:spLocks noGrp="1"/>
+          </p:cNvSpPr>
+          <p:nvPr>
+            <p:ph idx="1"/>
+          </p:nvPr>
+        </p:nvSpPr>
+        <p:spPr/>
+        <p:txBody>
+          <a:bodyPr/>
+          <a:lstStyle/>
+          <a:p>
+            <a:endParaRPr lang="en-IN"/>
+          </a:p>
+        </p:txBody>
+      </p:sp>
+      <p:pic>
+        <p:nvPicPr>
+          <p:cNvPr id="5" name="Picture 4">
+            <a:extLst>
+              <a:ext uri="{FF2B5EF4-FFF2-40B4-BE49-F238E27FC236}">
+                <a16:creationId xmlns:a16="http://schemas.microsoft.com/office/drawing/2014/main" id="{00A51B2C-507F-5A8D-0FA5-607B77E591E5}"/>
+              </a:ext>
+            </a:extLst>
+          </p:cNvPr>
+          <p:cNvPicPr>
+            <a:picLocks noChangeAspect="1"/>
+          </p:cNvPicPr>
+          <p:nvPr/>
+        </p:nvPicPr>
+        <p:blipFill>
+          <a:blip r:embed="rId2"/>
+          <a:stretch>
+            <a:fillRect/>
+          </a:stretch>
+        </p:blipFill>
+        <p:spPr>
+          <a:xfrm>
+            <a:off x="767580" y="0"/>
+            <a:ext cx="10656839" cy="6858000"/>
+          </a:xfrm>
+          <a:prstGeom prst="rect">
+            <a:avLst/>
+          </a:prstGeom>
+        </p:spPr>
+      </p:pic>
+    </p:spTree>
+    <p:extLst>
+      <p:ext uri="{BB962C8B-B14F-4D97-AF65-F5344CB8AC3E}">
+        <p14:creationId xmlns:p14="http://schemas.microsoft.com/office/powerpoint/2010/main" val="233973340"/>
+      </p:ext>
+    </p:extLst>
+  </p:cSld>
+  <p:clrMapOvr>
+    <a:masterClrMapping/>
+  </p:clrMapOvr>
+</p:sld>
+</file>
+
+<file path=ppt/slides/slide8.xml><?xml version="1.0" encoding="utf-8"?>
+<p:sld xmlns:a="http://schemas.openxmlformats.org/drawingml/2006/main" xmlns:r="http://schemas.openxmlformats.org/officeDocument/2006/relationships" xmlns:p="http://schemas.openxmlformats.org/presentationml/2006/main">
+  <p:cSld>
+    <p:spTree>
+      <p:nvGrpSpPr>
+        <p:cNvPr id="1" name=""/>
+        <p:cNvGrpSpPr/>
+        <p:nvPr/>
+      </p:nvGrpSpPr>
+      <p:grpSpPr>
+        <a:xfrm>
+          <a:off x="0" y="0"/>
+          <a:ext cx="0" cy="0"/>
+          <a:chOff x="0" y="0"/>
+          <a:chExt cx="0" cy="0"/>
+        </a:xfrm>
+      </p:grpSpPr>
+      <p:sp>
+        <p:nvSpPr>
+          <p:cNvPr id="2" name="Title 1">
+            <a:extLst>
+              <a:ext uri="{FF2B5EF4-FFF2-40B4-BE49-F238E27FC236}">
+                <a16:creationId xmlns:a16="http://schemas.microsoft.com/office/drawing/2014/main" id="{233C7701-A58F-2A02-A988-98A7AC34D90E}"/>
+              </a:ext>
+            </a:extLst>
+          </p:cNvPr>
+          <p:cNvSpPr>
+            <a:spLocks noGrp="1"/>
+          </p:cNvSpPr>
+          <p:nvPr>
+            <p:ph type="title"/>
+          </p:nvPr>
+        </p:nvSpPr>
+        <p:spPr/>
+        <p:txBody>
+          <a:bodyPr/>
+          <a:lstStyle/>
+          <a:p>
+            <a:endParaRPr lang="en-IN"/>
+          </a:p>
+        </p:txBody>
+      </p:sp>
+      <p:sp>
+        <p:nvSpPr>
+          <p:cNvPr id="3" name="Content Placeholder 2">
+            <a:extLst>
+              <a:ext uri="{FF2B5EF4-FFF2-40B4-BE49-F238E27FC236}">
+                <a16:creationId xmlns:a16="http://schemas.microsoft.com/office/drawing/2014/main" id="{E946C20F-C579-4D94-1B75-27D27B9EB457}"/>
+              </a:ext>
+            </a:extLst>
+          </p:cNvPr>
+          <p:cNvSpPr>
+            <a:spLocks noGrp="1"/>
+          </p:cNvSpPr>
+          <p:nvPr>
+            <p:ph idx="1"/>
+          </p:nvPr>
+        </p:nvSpPr>
+        <p:spPr/>
+        <p:txBody>
+          <a:bodyPr/>
+          <a:lstStyle/>
+          <a:p>
+            <a:endParaRPr lang="en-IN"/>
+          </a:p>
+        </p:txBody>
+      </p:sp>
+      <p:pic>
+        <p:nvPicPr>
+          <p:cNvPr id="5" name="Picture 4">
+            <a:extLst>
+              <a:ext uri="{FF2B5EF4-FFF2-40B4-BE49-F238E27FC236}">
+                <a16:creationId xmlns:a16="http://schemas.microsoft.com/office/drawing/2014/main" id="{E5F963CF-735E-D5D2-53A6-580027CE298B}"/>
+              </a:ext>
+            </a:extLst>
+          </p:cNvPr>
+          <p:cNvPicPr>
+            <a:picLocks noChangeAspect="1"/>
+          </p:cNvPicPr>
+          <p:nvPr/>
+        </p:nvPicPr>
+        <p:blipFill>
+          <a:blip r:embed="rId2"/>
+          <a:stretch>
+            <a:fillRect/>
+          </a:stretch>
+        </p:blipFill>
+        <p:spPr>
+          <a:xfrm>
+            <a:off x="1305048" y="0"/>
+            <a:ext cx="9581903" cy="6858000"/>
+          </a:xfrm>
+          <a:prstGeom prst="rect">
+            <a:avLst/>
+          </a:prstGeom>
+        </p:spPr>
+      </p:pic>
+    </p:spTree>
+    <p:extLst>
+      <p:ext uri="{BB962C8B-B14F-4D97-AF65-F5344CB8AC3E}">
+        <p14:creationId xmlns:p14="http://schemas.microsoft.com/office/powerpoint/2010/main" val="922980972"/>
+      </p:ext>
+    </p:extLst>
+  </p:cSld>
+  <p:clrMapOvr>
+    <a:masterClrMapping/>
+  </p:clrMapOvr>
+</p:sld>
+</file>
+
+<file path=ppt/slides/slide9.xml><?xml version="1.0" encoding="utf-8"?>
+<p:sld xmlns:a="http://schemas.openxmlformats.org/drawingml/2006/main" xmlns:r="http://schemas.openxmlformats.org/officeDocument/2006/relationships" xmlns:p="http://schemas.openxmlformats.org/presentationml/2006/main">
+  <p:cSld>
+    <p:spTree>
+      <p:nvGrpSpPr>
+        <p:cNvPr id="1" name=""/>
+        <p:cNvGrpSpPr/>
+        <p:nvPr/>
+      </p:nvGrpSpPr>
+      <p:grpSpPr>
+        <a:xfrm>
+          <a:off x="0" y="0"/>
+          <a:ext cx="0" cy="0"/>
+          <a:chOff x="0" y="0"/>
+          <a:chExt cx="0" cy="0"/>
+        </a:xfrm>
+      </p:grpSpPr>
+      <p:sp>
+        <p:nvSpPr>
+          <p:cNvPr id="2" name="Title 1">
+            <a:extLst>
+              <a:ext uri="{FF2B5EF4-FFF2-40B4-BE49-F238E27FC236}">
+                <a16:creationId xmlns:a16="http://schemas.microsoft.com/office/drawing/2014/main" id="{C069B9E9-51DB-AFF3-5E6B-037D866969B2}"/>
+              </a:ext>
+            </a:extLst>
+          </p:cNvPr>
+          <p:cNvSpPr>
+            <a:spLocks noGrp="1"/>
+          </p:cNvSpPr>
+          <p:nvPr>
+            <p:ph type="title"/>
+          </p:nvPr>
+        </p:nvSpPr>
+        <p:spPr/>
+        <p:txBody>
+          <a:bodyPr/>
+          <a:lstStyle/>
+          <a:p>
+            <a:endParaRPr lang="en-IN"/>
+          </a:p>
+        </p:txBody>
+      </p:sp>
+      <p:sp>
+        <p:nvSpPr>
+          <p:cNvPr id="3" name="Content Placeholder 2">
+            <a:extLst>
+              <a:ext uri="{FF2B5EF4-FFF2-40B4-BE49-F238E27FC236}">
+                <a16:creationId xmlns:a16="http://schemas.microsoft.com/office/drawing/2014/main" id="{D8801B16-086E-1A8C-28A8-E511688F9003}"/>
+              </a:ext>
+            </a:extLst>
+          </p:cNvPr>
+          <p:cNvSpPr>
+            <a:spLocks noGrp="1"/>
+          </p:cNvSpPr>
+          <p:nvPr>
+            <p:ph idx="1"/>
+          </p:nvPr>
+        </p:nvSpPr>
+        <p:spPr/>
+        <p:txBody>
+          <a:bodyPr/>
+          <a:lstStyle/>
+          <a:p>
+            <a:endParaRPr lang="en-IN"/>
+          </a:p>
+        </p:txBody>
+      </p:sp>
+      <p:pic>
+        <p:nvPicPr>
+          <p:cNvPr id="5" name="Picture 4">
+            <a:extLst>
+              <a:ext uri="{FF2B5EF4-FFF2-40B4-BE49-F238E27FC236}">
+                <a16:creationId xmlns:a16="http://schemas.microsoft.com/office/drawing/2014/main" id="{73CEB777-9FC8-398F-2065-40A5A2EB279D}"/>
+              </a:ext>
+            </a:extLst>
+          </p:cNvPr>
+          <p:cNvPicPr>
+            <a:picLocks noChangeAspect="1"/>
+          </p:cNvPicPr>
+          <p:nvPr/>
+        </p:nvPicPr>
+        <p:blipFill>
+          <a:blip r:embed="rId2"/>
+          <a:stretch>
+            <a:fillRect/>
+          </a:stretch>
+        </p:blipFill>
+        <p:spPr>
+          <a:xfrm>
+            <a:off x="0" y="389316"/>
+            <a:ext cx="12192000" cy="6079367"/>
+          </a:xfrm>
+          <a:prstGeom prst="rect">
+            <a:avLst/>
+          </a:prstGeom>
+        </p:spPr>
+      </p:pic>
+    </p:spTree>
+    <p:extLst>
+      <p:ext uri="{BB962C8B-B14F-4D97-AF65-F5344CB8AC3E}">
+        <p14:creationId xmlns:p14="http://schemas.microsoft.com/office/powerpoint/2010/main" val="469281924"/>
       </p:ext>
     </p:extLst>
   </p:cSld>
